--- a/docs/scout-training/معايير_التصميم_الاحترافي.pptx
+++ b/docs/scout-training/معايير_التصميم_الاحترافي.pptx
@@ -127,21 +127,21 @@
   <p:extLst>
     <p:ext uri="{521415D9-36F7-43E2-AB2F-B90AF26B5E84}">
       <p14:sectionLst xmlns:p14="http://schemas.microsoft.com/office/powerpoint/2010/main">
-        <p14:section name="الافتتاح" id="{32d71aff-51f4-29ad-250b-ae60f1991fd1}">
+        <p14:section name="الافتتاح" id="{a167381d-490e-ada3-01af-20c2c2650987}">
           <p14:sldIdLst>
             <p14:sldId id="256"/>
             <p14:sldId id="257"/>
             <p14:sldId id="258"/>
           </p14:sldIdLst>
         </p14:section>
-        <p14:section name="المبادئ الأساسية" id="{b473eddd-b87a-08b5-4817-047014797fa7}">
+        <p14:section name="المبادئ الأساسية" id="{9010904b-fff9-ff8c-c529-f2d1c6dd7f58}">
           <p14:sldIdLst>
             <p14:sldId id="259"/>
             <p14:sldId id="260"/>
             <p14:sldId id="261"/>
           </p14:sldIdLst>
         </p14:section>
-        <p14:section name="اللون والخط والمساحة" id="{44167b5b-2b14-9c25-1b45-3a6027c8534e}">
+        <p14:section name="اللون والخط والمساحة" id="{29a7b9c8-ee3d-22d4-2a40-392684f2985a}">
           <p14:sldIdLst>
             <p14:sldId id="262"/>
             <p14:sldId id="263"/>
@@ -149,7 +149,7 @@
             <p14:sldId id="265"/>
           </p14:sldIdLst>
         </p14:section>
-        <p14:section name="المحتوى والوسائط" id="{51af4506-9703-1570-3336-fcc8305143ef}">
+        <p14:section name="المحتوى والوسائط" id="{bbd6775e-e56e-a65a-c127-38d52ac98869}">
           <p14:sldIdLst>
             <p14:sldId id="266"/>
             <p14:sldId id="267"/>
@@ -159,7 +159,7 @@
             <p14:sldId id="271"/>
           </p14:sldIdLst>
         </p14:section>
-        <p14:section name="التطبيق والتقييم" id="{bcb35d03-b3b8-1180-4582-27cdc96678d7}">
+        <p14:section name="التطبيق والتقييم" id="{66e43e6a-414d-94de-44dc-f7911c4710e7}">
           <p14:sldIdLst>
             <p14:sldId id="272"/>
             <p14:sldId id="273"/>
@@ -167,7 +167,7 @@
             <p14:sldId id="275"/>
           </p14:sldIdLst>
         </p14:section>
-        <p14:section name="الختام" id="{9f910863-5264-2f3b-9b58-d0a1a06d3554}">
+        <p14:section name="الختام" id="{97542905-a861-399c-e355-574be7e6971b}">
           <p14:sldIdLst>
             <p14:sldId id="276"/>
           </p14:sldIdLst>
@@ -2432,12 +2432,36 @@
           <a:chExt cx="0" cy="0"/>
         </a:xfrm>
       </p:grpSpPr>
-      <p:sp>
-        <p:nvSpPr>
-          <p:cNvPr id="2" name="Text 0"/>
+      <p:pic>
+        <p:nvPicPr>
+          <p:cNvPr id="2" name="Image 0" descr="شعار الكشافة الإسلامية الجزائرية">    </p:cNvPr>
+          <p:cNvPicPr>
+            <a:picLocks noChangeAspect="1"/>
+          </p:cNvPicPr>
+          <p:nvPr/>
+        </p:nvPicPr>
+        <p:blipFill>
+          <a:blip r:embed="rId1"/>
+          <a:stretch>
+            <a:fillRect/>
+          </a:stretch>
+        </p:blipFill>
+        <p:spPr>
+          <a:xfrm>
+            <a:off x="548640" y="457200"/>
+            <a:ext cx="1554480" cy="1554480"/>
+          </a:xfrm>
+          <a:prstGeom prst="rect">
+            <a:avLst/>
+          </a:prstGeom>
+        </p:spPr>
+      </p:pic>
+      <p:sp>
+        <p:nvSpPr>
+          <p:cNvPr id="3" name="Text 0"/>
           <p:cNvSpPr/>
           <p:nvPr>
-            <p:ph idx="100" type="title" hasCustomPrompt="1"/>
+            <p:ph idx="101" type="title" hasCustomPrompt="1"/>
           </p:nvPr>
         </p:nvSpPr>
         <p:spPr>
@@ -2473,10 +2497,10 @@
       </p:sp>
       <p:sp>
         <p:nvSpPr>
-          <p:cNvPr id="3" name="Text 0"/>
+          <p:cNvPr id="4" name="Text 0"/>
           <p:cNvSpPr/>
           <p:nvPr>
-            <p:ph idx="101" type="body" hasCustomPrompt="1"/>
+            <p:ph idx="102" type="body" hasCustomPrompt="1"/>
           </p:nvPr>
         </p:nvSpPr>
         <p:spPr>
@@ -2497,7 +2521,7 @@
               <a:buNone/>
               <a:defRPr lang="ar-SA" altLang="en-US" sz="2200" dirty="0">
                 <a:solidFill>
-                  <a:schemeClr val="accent2"/>
+                  <a:schemeClr val="bg2"/>
                 </a:solidFill>
               </a:defRPr>
             </a:lvl1pPr>
@@ -2542,12 +2566,36 @@
           <a:chExt cx="0" cy="0"/>
         </a:xfrm>
       </p:grpSpPr>
-      <p:sp>
-        <p:nvSpPr>
-          <p:cNvPr id="2" name="Text 0"/>
+      <p:pic>
+        <p:nvPicPr>
+          <p:cNvPr id="2" name="Image 0" descr="شعار الكشافة الإسلامية الجزائرية">    </p:cNvPr>
+          <p:cNvPicPr>
+            <a:picLocks noChangeAspect="1"/>
+          </p:cNvPicPr>
+          <p:nvPr/>
+        </p:nvPicPr>
+        <p:blipFill>
+          <a:blip r:embed="rId1"/>
+          <a:stretch>
+            <a:fillRect/>
+          </a:stretch>
+        </p:blipFill>
+        <p:spPr>
+          <a:xfrm>
+            <a:off x="548640" y="457200"/>
+            <a:ext cx="1097280" cy="1097280"/>
+          </a:xfrm>
+          <a:prstGeom prst="rect">
+            <a:avLst/>
+          </a:prstGeom>
+        </p:spPr>
+      </p:pic>
+      <p:sp>
+        <p:nvSpPr>
+          <p:cNvPr id="3" name="Text 0"/>
           <p:cNvSpPr/>
           <p:nvPr>
-            <p:ph idx="100" type="title" hasCustomPrompt="1"/>
+            <p:ph idx="101" type="title" hasCustomPrompt="1"/>
           </p:nvPr>
         </p:nvSpPr>
         <p:spPr>
@@ -2583,10 +2631,10 @@
       </p:sp>
       <p:sp>
         <p:nvSpPr>
-          <p:cNvPr id="3" name="Text 0"/>
+          <p:cNvPr id="4" name="Text 0"/>
           <p:cNvSpPr/>
           <p:nvPr>
-            <p:ph idx="101" type="body" hasCustomPrompt="1"/>
+            <p:ph idx="102" type="body" hasCustomPrompt="1"/>
           </p:nvPr>
         </p:nvSpPr>
         <p:spPr>
@@ -2607,7 +2655,7 @@
               <a:buNone/>
               <a:defRPr lang="ar-SA" altLang="en-US" sz="2000" dirty="0">
                 <a:solidFill>
-                  <a:schemeClr val="accent2"/>
+                  <a:schemeClr val="bg2"/>
                 </a:solidFill>
               </a:defRPr>
             </a:lvl1pPr>
@@ -2697,18 +2745,42 @@
           <a:chExt cx="0" cy="0"/>
         </a:xfrm>
       </p:grpSpPr>
-      <p:sp>
-        <p:nvSpPr>
-          <p:cNvPr id="2" name="Text 0"/>
+      <p:pic>
+        <p:nvPicPr>
+          <p:cNvPr id="2" name="Image 0" descr="شعار الكشافة الإسلامية الجزائرية">    </p:cNvPr>
+          <p:cNvPicPr>
+            <a:picLocks noChangeAspect="1"/>
+          </p:cNvPicPr>
+          <p:nvPr/>
+        </p:nvPicPr>
+        <p:blipFill>
+          <a:blip r:embed="rId1"/>
+          <a:stretch>
+            <a:fillRect/>
+          </a:stretch>
+        </p:blipFill>
+        <p:spPr>
+          <a:xfrm>
+            <a:off x="548640" y="365760"/>
+            <a:ext cx="822960" cy="822960"/>
+          </a:xfrm>
+          <a:prstGeom prst="rect">
+            <a:avLst/>
+          </a:prstGeom>
+        </p:spPr>
+      </p:pic>
+      <p:sp>
+        <p:nvSpPr>
+          <p:cNvPr id="3" name="Text 0"/>
           <p:cNvSpPr/>
           <p:nvPr>
-            <p:ph idx="100" type="title" hasCustomPrompt="1"/>
+            <p:ph idx="101" type="title" hasCustomPrompt="1"/>
           </p:nvPr>
         </p:nvSpPr>
         <p:spPr>
           <a:xfrm>
-            <a:off x="548640" y="365760"/>
-            <a:ext cx="11094415" cy="822960"/>
+            <a:off x="1645920" y="365760"/>
+            <a:ext cx="9997135" cy="822960"/>
           </a:xfrm>
           <a:prstGeom prst="rect">
             <a:avLst/>
@@ -2738,7 +2810,7 @@
       </p:sp>
       <p:sp>
         <p:nvSpPr>
-          <p:cNvPr id="3" name="Text 0"/>
+          <p:cNvPr id="4" name="Text 0"/>
           <p:cNvSpPr/>
           <p:nvPr/>
         </p:nvSpPr>
@@ -2766,7 +2838,7 @@
                   <a:srgbClr val="5E6E66"/>
                 </a:solidFill>
               </a:rPr>
-              <a:t>دورة مساعد قائد تدريب  |  معايير التصميم الاحترافي</a:t>
+              <a:t>الكشافة الإسلامية الجزائرية  |  دورة مساعد قائد تدريب  |  معايير التصميم الاحترافي</a:t>
             </a:r>
             <a:endParaRPr lang="ar-SA" sz="1000" dirty="0"/>
           </a:p>
@@ -3172,7 +3244,7 @@
           <p:cNvPr id="2" name="Text 0"/>
           <p:cNvSpPr/>
           <p:nvPr>
-            <p:ph idx="100" type="title" hasCustomPrompt="1"/>
+            <p:ph idx="101" type="title" hasCustomPrompt="1"/>
           </p:nvPr>
         </p:nvSpPr>
         <p:spPr>
@@ -3210,7 +3282,7 @@
           <p:cNvPr id="3" name="Text 0"/>
           <p:cNvSpPr/>
           <p:nvPr>
-            <p:ph idx="101" type="body" hasCustomPrompt="1"/>
+            <p:ph idx="102" type="body" hasCustomPrompt="1"/>
           </p:nvPr>
         </p:nvSpPr>
         <p:spPr>
@@ -3234,7 +3306,7 @@
             <a:r>
               <a:rPr lang="ar-SA" altLang="en-US" sz="2200" dirty="0">
                 <a:solidFill>
-                  <a:schemeClr val="accent2"/>
+                  <a:schemeClr val="bg2"/>
                 </a:solidFill>
               </a:rPr>
               <a:t>للعروض والوسائل التدريبية  —  دورة مساعد قائد تدريب</a:t>
@@ -3243,33 +3315,9 @@
           </a:p>
         </p:txBody>
       </p:sp>
-      <p:pic>
-        <p:nvPicPr>
-          <p:cNvPr id="4" name="compass" descr="بوصلة">    </p:cNvPr>
-          <p:cNvPicPr>
-            <a:picLocks noChangeAspect="1"/>
-          </p:cNvPicPr>
-          <p:nvPr/>
-        </p:nvPicPr>
-        <p:blipFill>
-          <a:blip r:embed="rId1"/>
-          <a:stretch>
-            <a:fillRect/>
-          </a:stretch>
-        </p:blipFill>
-        <p:spPr>
-          <a:xfrm>
-            <a:off x="548640" y="548640"/>
-            <a:ext cx="1188720" cy="1188720"/>
-          </a:xfrm>
-          <a:prstGeom prst="rect">
-            <a:avLst/>
-          </a:prstGeom>
-        </p:spPr>
-      </p:pic>
-      <p:sp>
-        <p:nvSpPr>
-          <p:cNvPr id="5" name="Text 2"/>
+      <p:sp>
+        <p:nvSpPr>
+          <p:cNvPr id="4" name="Text 2"/>
           <p:cNvSpPr txBox="1"/>
           <p:nvPr/>
         </p:nvSpPr>
@@ -3297,7 +3345,7 @@
                   <a:srgbClr val="CFE0D5"/>
                 </a:solidFill>
               </a:rPr>
-              <a:t>الحركة الكشفية  |  جلسة تدريبية 60 دقيقة</a:t>
+              <a:t>الكشافة الإسلامية الجزائرية  |  جلسة تدريبية 60 دقيقة</a:t>
             </a:r>
             <a:endParaRPr lang="ar-SA" sz="1400" dirty="0"/>
           </a:p>
@@ -3333,13 +3381,13 @@
           <p:cNvPr id="2" name="Text 0"/>
           <p:cNvSpPr/>
           <p:nvPr>
-            <p:ph idx="100" type="title" hasCustomPrompt="1"/>
+            <p:ph idx="101" type="title" hasCustomPrompt="1"/>
           </p:nvPr>
         </p:nvSpPr>
         <p:spPr>
           <a:xfrm>
-            <a:off x="548640" y="365760"/>
-            <a:ext cx="11094415" cy="822960"/>
+            <a:off x="1645920" y="365760"/>
+            <a:ext cx="9997135" cy="822960"/>
           </a:xfrm>
           <a:prstGeom prst="rect">
             <a:avLst/>
@@ -3383,7 +3431,7 @@
             </a:avLst>
           </a:prstGeom>
           <a:solidFill>
-            <a:srgbClr val="F8E8E8"/>
+            <a:srgbClr val="FCEBEC"/>
           </a:solidFill>
           <a:ln/>
         </p:spPr>
@@ -3813,7 +3861,7 @@
           <p:cNvPr id="2" name="Text 0"/>
           <p:cNvSpPr/>
           <p:nvPr>
-            <p:ph idx="100" type="title" hasCustomPrompt="1"/>
+            <p:ph idx="101" type="title" hasCustomPrompt="1"/>
           </p:nvPr>
         </p:nvSpPr>
         <p:spPr>
@@ -3851,7 +3899,7 @@
           <p:cNvPr id="3" name="Text 0"/>
           <p:cNvSpPr/>
           <p:nvPr>
-            <p:ph idx="101" type="body" hasCustomPrompt="1"/>
+            <p:ph idx="102" type="body" hasCustomPrompt="1"/>
           </p:nvPr>
         </p:nvSpPr>
         <p:spPr>
@@ -3875,7 +3923,7 @@
             <a:r>
               <a:rPr lang="ar-SA" altLang="en-US" sz="2000" dirty="0">
                 <a:solidFill>
-                  <a:schemeClr val="accent2"/>
+                  <a:schemeClr val="bg2"/>
                 </a:solidFill>
               </a:rPr>
               <a:t>ما نقوله على الشريحة، وكيف نقوله</a:t>
@@ -3931,7 +3979,7 @@
             <a:r>
               <a:rPr lang="ar-SA" altLang="en-US" sz="5400" b="1" dirty="0">
                 <a:solidFill>
-                  <a:schemeClr val="tx2"/>
+                  <a:schemeClr val="bg1"/>
                 </a:solidFill>
               </a:rPr>
               <a:t>03</a:t>
@@ -4015,13 +4063,13 @@
           <p:cNvPr id="2" name="Text 0"/>
           <p:cNvSpPr/>
           <p:nvPr>
-            <p:ph idx="100" type="title" hasCustomPrompt="1"/>
+            <p:ph idx="101" type="title" hasCustomPrompt="1"/>
           </p:nvPr>
         </p:nvSpPr>
         <p:spPr>
           <a:xfrm>
-            <a:off x="548640" y="365760"/>
-            <a:ext cx="11094415" cy="822960"/>
+            <a:off x="1645920" y="365760"/>
+            <a:ext cx="9997135" cy="822960"/>
           </a:xfrm>
           <a:prstGeom prst="rect">
             <a:avLst/>
@@ -4513,13 +4561,13 @@
           <p:cNvPr id="2" name="Text 0"/>
           <p:cNvSpPr/>
           <p:nvPr>
-            <p:ph idx="100" type="title" hasCustomPrompt="1"/>
+            <p:ph idx="101" type="title" hasCustomPrompt="1"/>
           </p:nvPr>
         </p:nvSpPr>
         <p:spPr>
           <a:xfrm>
-            <a:off x="548640" y="365760"/>
-            <a:ext cx="11094415" cy="822960"/>
+            <a:off x="1645920" y="365760"/>
+            <a:ext cx="9997135" cy="822960"/>
           </a:xfrm>
           <a:prstGeom prst="rect">
             <a:avLst/>
@@ -5317,13 +5365,13 @@
           <p:cNvPr id="2" name="Text 0"/>
           <p:cNvSpPr/>
           <p:nvPr>
-            <p:ph idx="100" type="title" hasCustomPrompt="1"/>
+            <p:ph idx="101" type="title" hasCustomPrompt="1"/>
           </p:nvPr>
         </p:nvSpPr>
         <p:spPr>
           <a:xfrm>
-            <a:off x="548640" y="365760"/>
-            <a:ext cx="11094415" cy="822960"/>
+            <a:off x="1645920" y="365760"/>
+            <a:ext cx="9997135" cy="822960"/>
           </a:xfrm>
           <a:prstGeom prst="rect">
             <a:avLst/>
@@ -5439,7 +5487,7 @@
             </a:avLst>
           </a:prstGeom>
           <a:solidFill>
-            <a:srgbClr val="F8E8E8"/>
+            <a:srgbClr val="FCEBEC"/>
           </a:solidFill>
           <a:ln/>
         </p:spPr>
@@ -5579,7 +5627,7 @@
             </a:avLst>
           </a:prstGeom>
           <a:solidFill>
-            <a:srgbClr val="F8E8E8"/>
+            <a:srgbClr val="FCEBEC"/>
           </a:solidFill>
           <a:ln/>
         </p:spPr>
@@ -5719,7 +5767,7 @@
             </a:avLst>
           </a:prstGeom>
           <a:solidFill>
-            <a:srgbClr val="F8E8E8"/>
+            <a:srgbClr val="FCEBEC"/>
           </a:solidFill>
           <a:ln/>
         </p:spPr>
@@ -5859,7 +5907,7 @@
             </a:avLst>
           </a:prstGeom>
           <a:solidFill>
-            <a:srgbClr val="F8E8E8"/>
+            <a:srgbClr val="FCEBEC"/>
           </a:solidFill>
           <a:ln/>
         </p:spPr>
@@ -5999,7 +6047,7 @@
             </a:avLst>
           </a:prstGeom>
           <a:solidFill>
-            <a:srgbClr val="F8E8E8"/>
+            <a:srgbClr val="FCEBEC"/>
           </a:solidFill>
           <a:ln/>
         </p:spPr>
@@ -6197,13 +6245,13 @@
           <p:cNvPr id="2" name="Text 0"/>
           <p:cNvSpPr/>
           <p:nvPr>
-            <p:ph idx="100" type="title" hasCustomPrompt="1"/>
+            <p:ph idx="101" type="title" hasCustomPrompt="1"/>
           </p:nvPr>
         </p:nvSpPr>
         <p:spPr>
           <a:xfrm>
-            <a:off x="548640" y="365760"/>
-            <a:ext cx="11094415" cy="822960"/>
+            <a:off x="1645920" y="365760"/>
+            <a:ext cx="9997135" cy="822960"/>
           </a:xfrm>
           <a:prstGeom prst="rect">
             <a:avLst/>
@@ -6857,13 +6905,13 @@
           <p:cNvPr id="2" name="Text 0"/>
           <p:cNvSpPr/>
           <p:nvPr>
-            <p:ph idx="100" type="title" hasCustomPrompt="1"/>
+            <p:ph idx="101" type="title" hasCustomPrompt="1"/>
           </p:nvPr>
         </p:nvSpPr>
         <p:spPr>
           <a:xfrm>
-            <a:off x="548640" y="365760"/>
-            <a:ext cx="11094415" cy="822960"/>
+            <a:off x="1645920" y="365760"/>
+            <a:ext cx="9997135" cy="822960"/>
           </a:xfrm>
           <a:prstGeom prst="rect">
             <a:avLst/>
@@ -7379,7 +7427,7 @@
           <p:cNvPr id="2" name="Text 0"/>
           <p:cNvSpPr/>
           <p:nvPr>
-            <p:ph idx="100" type="title" hasCustomPrompt="1"/>
+            <p:ph idx="101" type="title" hasCustomPrompt="1"/>
           </p:nvPr>
         </p:nvSpPr>
         <p:spPr>
@@ -7417,7 +7465,7 @@
           <p:cNvPr id="3" name="Text 0"/>
           <p:cNvSpPr/>
           <p:nvPr>
-            <p:ph idx="101" type="body" hasCustomPrompt="1"/>
+            <p:ph idx="102" type="body" hasCustomPrompt="1"/>
           </p:nvPr>
         </p:nvSpPr>
         <p:spPr>
@@ -7441,7 +7489,7 @@
             <a:r>
               <a:rPr lang="ar-SA" altLang="en-US" sz="2000" dirty="0">
                 <a:solidFill>
-                  <a:schemeClr val="accent2"/>
+                  <a:schemeClr val="bg2"/>
                 </a:solidFill>
               </a:rPr>
               <a:t>من المعرفة إلى المهارة</a:t>
@@ -7497,7 +7545,7 @@
             <a:r>
               <a:rPr lang="ar-SA" altLang="en-US" sz="5400" b="1" dirty="0">
                 <a:solidFill>
-                  <a:schemeClr val="tx2"/>
+                  <a:schemeClr val="bg1"/>
                 </a:solidFill>
               </a:rPr>
               <a:t>04</a:t>
@@ -7581,13 +7629,13 @@
           <p:cNvPr id="2" name="Text 0"/>
           <p:cNvSpPr/>
           <p:nvPr>
-            <p:ph idx="100" type="title" hasCustomPrompt="1"/>
+            <p:ph idx="101" type="title" hasCustomPrompt="1"/>
           </p:nvPr>
         </p:nvSpPr>
         <p:spPr>
           <a:xfrm>
-            <a:off x="548640" y="365760"/>
-            <a:ext cx="11094415" cy="822960"/>
+            <a:off x="1645920" y="365760"/>
+            <a:ext cx="9997135" cy="822960"/>
           </a:xfrm>
           <a:prstGeom prst="rect">
             <a:avLst/>
@@ -8345,13 +8393,13 @@
           <p:cNvPr id="2" name="Text 0"/>
           <p:cNvSpPr/>
           <p:nvPr>
-            <p:ph idx="100" type="title" hasCustomPrompt="1"/>
+            <p:ph idx="101" type="title" hasCustomPrompt="1"/>
           </p:nvPr>
         </p:nvSpPr>
         <p:spPr>
           <a:xfrm>
-            <a:off x="548640" y="365760"/>
-            <a:ext cx="11094415" cy="822960"/>
+            <a:off x="1645920" y="365760"/>
+            <a:ext cx="9997135" cy="822960"/>
           </a:xfrm>
           <a:prstGeom prst="rect">
             <a:avLst/>
@@ -8779,7 +8827,7 @@
             <a:r>
               <a:rPr lang="ar-SA" altLang="en-US" sz="2000" b="1" dirty="0">
                 <a:solidFill>
-                  <a:schemeClr val="tx2"/>
+                  <a:schemeClr val="bg1"/>
                 </a:solidFill>
               </a:rPr>
               <a:t>1</a:t>
@@ -8907,7 +8955,7 @@
             <a:r>
               <a:rPr lang="ar-SA" altLang="en-US" sz="2000" b="1" dirty="0">
                 <a:solidFill>
-                  <a:schemeClr val="tx2"/>
+                  <a:schemeClr val="bg1"/>
                 </a:solidFill>
               </a:rPr>
               <a:t>2</a:t>
@@ -9035,7 +9083,7 @@
             <a:r>
               <a:rPr lang="ar-SA" altLang="en-US" sz="2000" b="1" dirty="0">
                 <a:solidFill>
-                  <a:schemeClr val="tx2"/>
+                  <a:schemeClr val="bg1"/>
                 </a:solidFill>
               </a:rPr>
               <a:t>3</a:t>
@@ -9163,7 +9211,7 @@
             <a:r>
               <a:rPr lang="ar-SA" altLang="en-US" sz="2000" b="1" dirty="0">
                 <a:solidFill>
-                  <a:schemeClr val="tx2"/>
+                  <a:schemeClr val="bg1"/>
                 </a:solidFill>
               </a:rPr>
               <a:t>4</a:t>
@@ -9319,13 +9367,13 @@
           <p:cNvPr id="2" name="Text 0"/>
           <p:cNvSpPr/>
           <p:nvPr>
-            <p:ph idx="100" type="title" hasCustomPrompt="1"/>
+            <p:ph idx="101" type="title" hasCustomPrompt="1"/>
           </p:nvPr>
         </p:nvSpPr>
         <p:spPr>
           <a:xfrm>
-            <a:off x="548640" y="365760"/>
-            <a:ext cx="11094415" cy="822960"/>
+            <a:off x="1645920" y="365760"/>
+            <a:ext cx="9997135" cy="822960"/>
           </a:xfrm>
           <a:prstGeom prst="rect">
             <a:avLst/>
@@ -9927,13 +9975,13 @@
           <p:cNvPr id="2" name="Text 0"/>
           <p:cNvSpPr/>
           <p:nvPr>
-            <p:ph idx="100" type="title" hasCustomPrompt="1"/>
+            <p:ph idx="101" type="title" hasCustomPrompt="1"/>
           </p:nvPr>
         </p:nvSpPr>
         <p:spPr>
           <a:xfrm>
-            <a:off x="548640" y="365760"/>
-            <a:ext cx="11094415" cy="822960"/>
+            <a:off x="1645920" y="365760"/>
+            <a:ext cx="9997135" cy="822960"/>
           </a:xfrm>
           <a:prstGeom prst="rect">
             <a:avLst/>
@@ -10046,7 +10094,7 @@
                       <a:tailEnd type="none" w="med" len="med"/>
                     </a:lnB>
                     <a:solidFill>
-                      <a:srgbClr val="1F4D3A"/>
+                      <a:srgbClr val="00632B"/>
                     </a:solidFill>
                   </a:tcPr>
                 </a:tc>
@@ -10107,7 +10155,7 @@
                       <a:tailEnd type="none" w="med" len="med"/>
                     </a:lnB>
                     <a:solidFill>
-                      <a:srgbClr val="1F4D3A"/>
+                      <a:srgbClr val="00632B"/>
                     </a:solidFill>
                   </a:tcPr>
                 </a:tc>
@@ -10168,7 +10216,7 @@
                       <a:tailEnd type="none" w="med" len="med"/>
                     </a:lnB>
                     <a:solidFill>
-                      <a:srgbClr val="1F4D3A"/>
+                      <a:srgbClr val="00632B"/>
                     </a:solidFill>
                   </a:tcPr>
                 </a:tc>
@@ -10229,7 +10277,7 @@
                       <a:tailEnd type="none" w="med" len="med"/>
                     </a:lnB>
                     <a:solidFill>
-                      <a:srgbClr val="1F4D3A"/>
+                      <a:srgbClr val="00632B"/>
                     </a:solidFill>
                   </a:tcPr>
                 </a:tc>
@@ -10429,7 +10477,7 @@
                       <a:r>
                         <a:rPr lang="ar-SA" altLang="en-US" sz="1400" b="1" dirty="0">
                           <a:solidFill>
-                            <a:srgbClr val="1F4D3A"/>
+                            <a:srgbClr val="00632B"/>
                           </a:solidFill>
                         </a:rPr>
                         <a:t>وضوح الرسالة</a:t>
@@ -10675,7 +10723,7 @@
                       <a:r>
                         <a:rPr lang="ar-SA" altLang="en-US" sz="1400" b="1" dirty="0">
                           <a:solidFill>
-                            <a:srgbClr val="1F4D3A"/>
+                            <a:srgbClr val="00632B"/>
                           </a:solidFill>
                         </a:rPr>
                         <a:t>التباين والتسلسل</a:t>
@@ -10921,7 +10969,7 @@
                       <a:r>
                         <a:rPr lang="ar-SA" altLang="en-US" sz="1400" b="1" dirty="0">
                           <a:solidFill>
-                            <a:srgbClr val="1F4D3A"/>
+                            <a:srgbClr val="00632B"/>
                           </a:solidFill>
                         </a:rPr>
                         <a:t>المحاذاة والتقارب</a:t>
@@ -11167,7 +11215,7 @@
                       <a:r>
                         <a:rPr lang="ar-SA" altLang="en-US" sz="1400" b="1" dirty="0">
                           <a:solidFill>
-                            <a:srgbClr val="1F4D3A"/>
+                            <a:srgbClr val="00632B"/>
                           </a:solidFill>
                         </a:rPr>
                         <a:t>اللون والخط</a:t>
@@ -11413,7 +11461,7 @@
                       <a:r>
                         <a:rPr lang="ar-SA" altLang="en-US" sz="1400" b="1" dirty="0">
                           <a:solidFill>
-                            <a:srgbClr val="1F4D3A"/>
+                            <a:srgbClr val="00632B"/>
                           </a:solidFill>
                         </a:rPr>
                         <a:t>المقروئية</a:t>
@@ -11579,7 +11627,7 @@
           <p:cNvPr id="2" name="Text 0"/>
           <p:cNvSpPr/>
           <p:nvPr>
-            <p:ph idx="100" type="title" hasCustomPrompt="1"/>
+            <p:ph idx="101" type="title" hasCustomPrompt="1"/>
           </p:nvPr>
         </p:nvSpPr>
         <p:spPr>
@@ -11617,7 +11665,7 @@
           <p:cNvPr id="3" name="Text 0"/>
           <p:cNvSpPr/>
           <p:nvPr>
-            <p:ph idx="101" type="body" hasCustomPrompt="1"/>
+            <p:ph idx="102" type="body" hasCustomPrompt="1"/>
           </p:nvPr>
         </p:nvSpPr>
         <p:spPr>
@@ -11641,7 +11689,7 @@
             <a:r>
               <a:rPr lang="ar-SA" altLang="en-US" sz="2200" dirty="0">
                 <a:solidFill>
-                  <a:schemeClr val="accent2"/>
+                  <a:schemeClr val="bg2"/>
                 </a:solidFill>
               </a:rPr>
               <a:t>وضوح  •  بساطة  •  اتساق  •  احترام للمتدرب</a:t>
@@ -11650,33 +11698,9 @@
           </a:p>
         </p:txBody>
       </p:sp>
-      <p:pic>
-        <p:nvPicPr>
-          <p:cNvPr id="4" name="closing-icon" descr="مخيم">    </p:cNvPr>
-          <p:cNvPicPr>
-            <a:picLocks noChangeAspect="1"/>
-          </p:cNvPicPr>
-          <p:nvPr/>
-        </p:nvPicPr>
-        <p:blipFill>
-          <a:blip r:embed="rId1"/>
-          <a:stretch>
-            <a:fillRect/>
-          </a:stretch>
-        </p:blipFill>
-        <p:spPr>
-          <a:xfrm>
-            <a:off x="548640" y="548640"/>
-            <a:ext cx="1188720" cy="1188720"/>
-          </a:xfrm>
-          <a:prstGeom prst="rect">
-            <a:avLst/>
-          </a:prstGeom>
-        </p:spPr>
-      </p:pic>
-      <p:sp>
-        <p:nvSpPr>
-          <p:cNvPr id="5" name="Text 2"/>
+      <p:sp>
+        <p:nvSpPr>
+          <p:cNvPr id="4" name="Text 2"/>
           <p:cNvSpPr txBox="1"/>
           <p:nvPr/>
         </p:nvSpPr>
@@ -11740,13 +11764,13 @@
           <p:cNvPr id="2" name="Text 0"/>
           <p:cNvSpPr/>
           <p:nvPr>
-            <p:ph idx="100" type="title" hasCustomPrompt="1"/>
+            <p:ph idx="101" type="title" hasCustomPrompt="1"/>
           </p:nvPr>
         </p:nvSpPr>
         <p:spPr>
           <a:xfrm>
-            <a:off x="548640" y="365760"/>
-            <a:ext cx="11094415" cy="822960"/>
+            <a:off x="1645920" y="365760"/>
+            <a:ext cx="9997135" cy="822960"/>
           </a:xfrm>
           <a:prstGeom prst="rect">
             <a:avLst/>
@@ -12262,7 +12286,7 @@
           <p:cNvPr id="2" name="Text 0"/>
           <p:cNvSpPr/>
           <p:nvPr>
-            <p:ph idx="100" type="title" hasCustomPrompt="1"/>
+            <p:ph idx="101" type="title" hasCustomPrompt="1"/>
           </p:nvPr>
         </p:nvSpPr>
         <p:spPr>
@@ -12300,7 +12324,7 @@
           <p:cNvPr id="3" name="Text 0"/>
           <p:cNvSpPr/>
           <p:nvPr>
-            <p:ph idx="101" type="body" hasCustomPrompt="1"/>
+            <p:ph idx="102" type="body" hasCustomPrompt="1"/>
           </p:nvPr>
         </p:nvSpPr>
         <p:spPr>
@@ -12324,7 +12348,7 @@
             <a:r>
               <a:rPr lang="ar-SA" altLang="en-US" sz="2000" dirty="0">
                 <a:solidFill>
-                  <a:schemeClr val="accent2"/>
+                  <a:schemeClr val="bg2"/>
                 </a:solidFill>
               </a:rPr>
               <a:t>القاعدة التي تُبنى عليها كل شريحة ناجحة</a:t>
@@ -12380,7 +12404,7 @@
             <a:r>
               <a:rPr lang="ar-SA" altLang="en-US" sz="5400" b="1" dirty="0">
                 <a:solidFill>
-                  <a:schemeClr val="tx2"/>
+                  <a:schemeClr val="bg1"/>
                 </a:solidFill>
               </a:rPr>
               <a:t>01</a:t>
@@ -12464,13 +12488,13 @@
           <p:cNvPr id="2" name="Text 0"/>
           <p:cNvSpPr/>
           <p:nvPr>
-            <p:ph idx="100" type="title" hasCustomPrompt="1"/>
+            <p:ph idx="101" type="title" hasCustomPrompt="1"/>
           </p:nvPr>
         </p:nvSpPr>
         <p:spPr>
           <a:xfrm>
-            <a:off x="548640" y="365760"/>
-            <a:ext cx="11094415" cy="822960"/>
+            <a:off x="1645920" y="365760"/>
+            <a:ext cx="9997135" cy="822960"/>
           </a:xfrm>
           <a:prstGeom prst="rect">
             <a:avLst/>
@@ -12491,7 +12515,7 @@
                   <a:schemeClr val="tx2"/>
                 </a:solidFill>
               </a:rPr>
-              <a:t>المبادئ الأربعة: التباين، التكرار، المحاذاة، التقارب</a:t>
+              <a:t>التباين، التكرار، المحاذاة، التقارب</a:t>
             </a:r>
             <a:endParaRPr lang="ar-SA" sz="3400" dirty="0"/>
           </a:p>
@@ -13124,13 +13148,13 @@
           <p:cNvPr id="2" name="Text 0"/>
           <p:cNvSpPr/>
           <p:nvPr>
-            <p:ph idx="100" type="title" hasCustomPrompt="1"/>
+            <p:ph idx="101" type="title" hasCustomPrompt="1"/>
           </p:nvPr>
         </p:nvSpPr>
         <p:spPr>
           <a:xfrm>
-            <a:off x="548640" y="365760"/>
-            <a:ext cx="11094415" cy="822960"/>
+            <a:off x="1645920" y="365760"/>
+            <a:ext cx="9997135" cy="822960"/>
           </a:xfrm>
           <a:prstGeom prst="rect">
             <a:avLst/>
@@ -13370,7 +13394,7 @@
             <a:r>
               <a:rPr lang="ar-SA" altLang="en-US" sz="2200" b="1" dirty="0">
                 <a:solidFill>
-                  <a:schemeClr val="tx2"/>
+                  <a:schemeClr val="bg1"/>
                 </a:solidFill>
               </a:rPr>
               <a:t>1</a:t>
@@ -13462,7 +13486,7 @@
             <a:r>
               <a:rPr lang="ar-SA" altLang="en-US" sz="2200" b="1" dirty="0">
                 <a:solidFill>
-                  <a:schemeClr val="tx2"/>
+                  <a:schemeClr val="bg1"/>
                 </a:solidFill>
               </a:rPr>
               <a:t>2</a:t>
@@ -13554,7 +13578,7 @@
             <a:r>
               <a:rPr lang="ar-SA" altLang="en-US" sz="2200" b="1" dirty="0">
                 <a:solidFill>
-                  <a:schemeClr val="tx2"/>
+                  <a:schemeClr val="bg1"/>
                 </a:solidFill>
               </a:rPr>
               <a:t>3</a:t>
@@ -13646,7 +13670,7 @@
             <a:r>
               <a:rPr lang="ar-SA" altLang="en-US" sz="2200" b="1" dirty="0">
                 <a:solidFill>
-                  <a:schemeClr val="tx2"/>
+                  <a:schemeClr val="bg1"/>
                 </a:solidFill>
               </a:rPr>
               <a:t>4</a:t>
@@ -13766,7 +13790,7 @@
           <p:cNvPr id="2" name="Text 0"/>
           <p:cNvSpPr/>
           <p:nvPr>
-            <p:ph idx="100" type="title" hasCustomPrompt="1"/>
+            <p:ph idx="101" type="title" hasCustomPrompt="1"/>
           </p:nvPr>
         </p:nvSpPr>
         <p:spPr>
@@ -13804,7 +13828,7 @@
           <p:cNvPr id="3" name="Text 0"/>
           <p:cNvSpPr/>
           <p:nvPr>
-            <p:ph idx="101" type="body" hasCustomPrompt="1"/>
+            <p:ph idx="102" type="body" hasCustomPrompt="1"/>
           </p:nvPr>
         </p:nvSpPr>
         <p:spPr>
@@ -13828,7 +13852,7 @@
             <a:r>
               <a:rPr lang="ar-SA" altLang="en-US" sz="2000" dirty="0">
                 <a:solidFill>
-                  <a:schemeClr val="accent2"/>
+                  <a:schemeClr val="bg2"/>
                 </a:solidFill>
               </a:rPr>
               <a:t>الأدوات الثلاث التي تصنع الانطباع الأول</a:t>
@@ -13884,7 +13908,7 @@
             <a:r>
               <a:rPr lang="ar-SA" altLang="en-US" sz="5400" b="1" dirty="0">
                 <a:solidFill>
-                  <a:schemeClr val="tx2"/>
+                  <a:schemeClr val="bg1"/>
                 </a:solidFill>
               </a:rPr>
               <a:t>02</a:t>
@@ -13968,13 +13992,13 @@
           <p:cNvPr id="2" name="Text 0"/>
           <p:cNvSpPr/>
           <p:nvPr>
-            <p:ph idx="100" type="title" hasCustomPrompt="1"/>
+            <p:ph idx="101" type="title" hasCustomPrompt="1"/>
           </p:nvPr>
         </p:nvSpPr>
         <p:spPr>
           <a:xfrm>
-            <a:off x="548640" y="365760"/>
-            <a:ext cx="11094415" cy="822960"/>
+            <a:off x="1645920" y="365760"/>
+            <a:ext cx="9997135" cy="822960"/>
           </a:xfrm>
           <a:prstGeom prst="rect">
             <a:avLst/>
@@ -14165,7 +14189,7 @@
             <a:r>
               <a:rPr lang="ar-SA" altLang="en-US" sz="2000" b="1" dirty="0">
                 <a:solidFill>
-                  <a:schemeClr val="tx2"/>
+                  <a:schemeClr val="bg1"/>
                 </a:solidFill>
               </a:rPr>
               <a:t>10%</a:t>
@@ -14604,13 +14628,13 @@
           <p:cNvPr id="2" name="Text 0"/>
           <p:cNvSpPr/>
           <p:nvPr>
-            <p:ph idx="100" type="title" hasCustomPrompt="1"/>
+            <p:ph idx="101" type="title" hasCustomPrompt="1"/>
           </p:nvPr>
         </p:nvSpPr>
         <p:spPr>
           <a:xfrm>
-            <a:off x="548640" y="365760"/>
-            <a:ext cx="11094415" cy="822960"/>
+            <a:off x="1645920" y="365760"/>
+            <a:ext cx="9997135" cy="822960"/>
           </a:xfrm>
           <a:prstGeom prst="rect">
             <a:avLst/>
@@ -14830,7 +14854,7 @@
             </a:avLst>
           </a:prstGeom>
           <a:solidFill>
-            <a:srgbClr val="F8E8E8"/>
+            <a:srgbClr val="FCEBEC"/>
           </a:solidFill>
           <a:ln/>
         </p:spPr>
@@ -15053,31 +15077,31 @@
         <a:srgbClr val="FFFFFF"/>
       </a:lt1>
       <a:dk2>
-        <a:srgbClr val="1F4D3A"/>
+        <a:srgbClr val="00632B"/>
       </a:dk2>
       <a:lt2>
-        <a:srgbClr val="EAF2EC"/>
+        <a:srgbClr val="EAF5EC"/>
       </a:lt2>
       <a:accent1>
-        <a:srgbClr val="1F4D3A"/>
+        <a:srgbClr val="00632B"/>
       </a:accent1>
       <a:accent2>
-        <a:srgbClr val="D9A425"/>
+        <a:srgbClr val="D7141A"/>
       </a:accent2>
       <a:accent3>
-        <a:srgbClr val="2E6B50"/>
+        <a:srgbClr val="1E8A3E"/>
       </a:accent3>
       <a:accent4>
-        <a:srgbClr val="B23A3A"/>
+        <a:srgbClr val="B0101A"/>
       </a:accent4>
       <a:accent5>
         <a:srgbClr val="5E6E66"/>
       </a:accent5>
       <a:accent6>
-        <a:srgbClr val="8FB59E"/>
+        <a:srgbClr val="7FBF8E"/>
       </a:accent6>
       <a:hlink>
-        <a:srgbClr val="2E6B50"/>
+        <a:srgbClr val="1E8A3E"/>
       </a:hlink>
       <a:folHlink>
         <a:srgbClr val="5E6E66"/>
